--- a/tutor-time/fuel-and-focus/downloads/Fuel_and_Focus_Lesson_3.pptx
+++ b/tutor-time/fuel-and-focus/downloads/Fuel_and_Focus_Lesson_3.pptx
@@ -4511,7 +4511,7 @@
                 </a:solidFill>
                 <a:latin typeface="Karla"/>
               </a:rPr>
-              <a:t>FIND YOUR SHEET FROM THREE WEEKS AGO</a:t>
+              <a:t>FIND YOUR SHEET FROM LESSON ONE</a:t>
             </a:r>
           </a:p>
         </p:txBody>
@@ -5253,7 +5253,7 @@
                 </a:solidFill>
                 <a:latin typeface="Karla"/>
               </a:rPr>
-              <a:t>Three weeks ago most of this room ranked the snacks on sugar alone. That is what has changed.</a:t>
+              <a:t>In lesson one most of this room ranked the snacks on sugar alone. That is what has changed.</a:t>
             </a:r>
           </a:p>
         </p:txBody>
@@ -6119,7 +6119,7 @@
                 </a:solidFill>
                 <a:latin typeface="Karla"/>
               </a:rPr>
-              <a:t>ON THE SLIP, THEN KEEP IT</a:t>
+              <a:t>ON PAPER, THEN KEEP IT</a:t>
             </a:r>
           </a:p>
         </p:txBody>
@@ -10561,7 +10561,7 @@
                 </a:solidFill>
                 <a:latin typeface="Libre Caslon Display"/>
               </a:rPr>
-              <a:t>“Toast with jam, and a glass of orange juice.”</a:t>
+              <a:t>“White toast with jam, and a glass of orange juice.”</a:t>
             </a:r>
           </a:p>
         </p:txBody>
@@ -10825,7 +10825,7 @@
                 </a:solidFill>
                 <a:latin typeface="Karla"/>
               </a:rPr>
-              <a:t>A little, if the bread is wholemeal. Almost none from the juice.</a:t>
+              <a:t>Very little from white bread. Almost none from the juice.</a:t>
             </a:r>
           </a:p>
         </p:txBody>

--- a/tutor-time/fuel-and-focus/downloads/Fuel_and_Focus_Lesson_3.pptx
+++ b/tutor-time/fuel-and-focus/downloads/Fuel_and_Focus_Lesson_3.pptx
@@ -3205,7 +3205,7 @@
                 <a:solidFill>
                   <a:srgbClr val="256B4A"/>
                 </a:solidFill>
-                <a:latin typeface="Karla"/>
+                <a:latin typeface="Calibri"/>
               </a:rPr>
               <a:t>FUEL AND FOCUS  ·  LESSON 3 OF 3</a:t>
             </a:r>
@@ -3243,11 +3243,11 @@
               </a:spcAft>
             </a:pPr>
             <a:r>
-              <a:rPr sz="3400" b="1" i="0">
+              <a:rPr sz="3400" b="0" i="0">
                 <a:solidFill>
                   <a:srgbClr val="256B4A"/>
                 </a:solidFill>
-                <a:latin typeface="Libre Caslon Display"/>
+                <a:latin typeface="Georgia"/>
               </a:rPr>
               <a:t>The one you would actually eat</a:t>
             </a:r>
@@ -3333,7 +3333,7 @@
                 <a:solidFill>
                   <a:srgbClr val="5F6B64"/>
                 </a:solidFill>
-                <a:latin typeface="Karla"/>
+                <a:latin typeface="Calibri"/>
               </a:rPr>
               <a:t>Anyone can design a snack that is good for them.</a:t>
             </a:r>
@@ -3343,7 +3343,7 @@
                 <a:solidFill>
                   <a:srgbClr val="5F6B64"/>
                 </a:solidFill>
-                <a:latin typeface="Karla"/>
+                <a:latin typeface="Calibri"/>
               </a:rPr>
               <a:t>The hard part is designing one you will still want in three weeks.</a:t>
             </a:r>
@@ -3385,7 +3385,7 @@
                 <a:solidFill>
                   <a:srgbClr val="98A29B"/>
                 </a:solidFill>
-                <a:latin typeface="Karla"/>
+                <a:latin typeface="Calibri"/>
               </a:rPr>
               <a:t>Healthy Body, Healthy Mind</a:t>
             </a:r>
@@ -3451,7 +3451,7 @@
                 <a:solidFill>
                   <a:srgbClr val="98A29B"/>
                 </a:solidFill>
-                <a:latin typeface="Karla"/>
+                <a:latin typeface="Calibri"/>
               </a:rPr>
               <a:t>The Pastoral Guide</a:t>
             </a:r>
@@ -3493,7 +3493,7 @@
                 <a:solidFill>
                   <a:srgbClr val="98A29B"/>
                 </a:solidFill>
-                <a:latin typeface="Karla"/>
+                <a:latin typeface="Calibri"/>
               </a:rPr>
               <a:t>1 / 15</a:t>
             </a:r>
@@ -3643,7 +3643,7 @@
                 <a:solidFill>
                   <a:srgbClr val="256B4A"/>
                 </a:solidFill>
-                <a:latin typeface="Karla"/>
+                <a:latin typeface="Calibri"/>
               </a:rPr>
               <a:t>OPTION B</a:t>
             </a:r>
@@ -3685,7 +3685,7 @@
                 <a:solidFill>
                   <a:srgbClr val="CBDFD6"/>
                 </a:solidFill>
-                <a:latin typeface="Karla"/>
+                <a:latin typeface="Calibri"/>
               </a:rPr>
               <a:t>WHEN TASTING IS OUT</a:t>
             </a:r>
@@ -3723,11 +3723,11 @@
               </a:spcAft>
             </a:pPr>
             <a:r>
-              <a:rPr sz="3300" b="1" i="0">
+              <a:rPr sz="3300" b="0" i="0">
                 <a:solidFill>
                   <a:srgbClr val="FFFDF7"/>
                 </a:solidFill>
-                <a:latin typeface="Libre Caslon Display"/>
+                <a:latin typeface="Georgia"/>
               </a:rPr>
               <a:t>Pitch it instead</a:t>
             </a:r>
@@ -3857,11 +3857,11 @@
               </a:spcAft>
             </a:pPr>
             <a:r>
-              <a:rPr sz="1150" b="1" i="0">
+              <a:rPr sz="1150" b="0" i="0">
                 <a:solidFill>
                   <a:srgbClr val="FFFDF7"/>
                 </a:solidFill>
-                <a:latin typeface="Libre Caslon Display"/>
+                <a:latin typeface="Georgia"/>
               </a:rPr>
               <a:t>1</a:t>
             </a:r>
@@ -3903,7 +3903,7 @@
                 <a:solidFill>
                   <a:srgbClr val="256B4A"/>
                 </a:solidFill>
-                <a:latin typeface="Karla"/>
+                <a:latin typeface="Calibri"/>
               </a:rPr>
               <a:t>Thirty seconds each, standing up, to your table.</a:t>
             </a:r>
@@ -4033,11 +4033,11 @@
               </a:spcAft>
             </a:pPr>
             <a:r>
-              <a:rPr sz="1150" b="1" i="0">
+              <a:rPr sz="1150" b="0" i="0">
                 <a:solidFill>
                   <a:srgbClr val="FFFDF7"/>
                 </a:solidFill>
-                <a:latin typeface="Libre Caslon Display"/>
+                <a:latin typeface="Georgia"/>
               </a:rPr>
               <a:t>2</a:t>
             </a:r>
@@ -4079,7 +4079,7 @@
                 <a:solidFill>
                   <a:srgbClr val="256B4A"/>
                 </a:solidFill>
-                <a:latin typeface="Karla"/>
+                <a:latin typeface="Calibri"/>
               </a:rPr>
               <a:t>Say what is in it, which job each thing does, and when you would eat it.</a:t>
             </a:r>
@@ -4209,11 +4209,11 @@
               </a:spcAft>
             </a:pPr>
             <a:r>
-              <a:rPr sz="1150" b="1" i="0">
+              <a:rPr sz="1150" b="0" i="0">
                 <a:solidFill>
                   <a:srgbClr val="FFFDF7"/>
                 </a:solidFill>
-                <a:latin typeface="Libre Caslon Display"/>
+                <a:latin typeface="Georgia"/>
               </a:rPr>
               <a:t>3</a:t>
             </a:r>
@@ -4255,7 +4255,7 @@
                 <a:solidFill>
                   <a:srgbClr val="256B4A"/>
                 </a:solidFill>
-                <a:latin typeface="Karla"/>
+                <a:latin typeface="Calibri"/>
               </a:rPr>
               <a:t>The table votes for one to go forward. You may not vote for your own.</a:t>
             </a:r>
@@ -4297,7 +4297,7 @@
                 <a:solidFill>
                   <a:srgbClr val="CBDFD6"/>
                 </a:solidFill>
-                <a:latin typeface="Karla"/>
+                <a:latin typeface="Calibri"/>
               </a:rPr>
               <a:t>Thirty seconds is short on purpose. If you cannot explain it in that time, it is too complicated.</a:t>
             </a:r>
@@ -4363,7 +4363,7 @@
                 <a:solidFill>
                   <a:srgbClr val="CBDFD6"/>
                 </a:solidFill>
-                <a:latin typeface="Karla"/>
+                <a:latin typeface="Calibri"/>
               </a:rPr>
               <a:t>The Pastoral Guide</a:t>
             </a:r>
@@ -4405,7 +4405,7 @@
                 <a:solidFill>
                   <a:srgbClr val="CBDFD6"/>
                 </a:solidFill>
-                <a:latin typeface="Karla"/>
+                <a:latin typeface="Calibri"/>
               </a:rPr>
               <a:t>10 / 15</a:t>
             </a:r>
@@ -4509,97 +4509,9 @@
                 <a:solidFill>
                   <a:srgbClr val="256B4A"/>
                 </a:solidFill>
-                <a:latin typeface="Karla"/>
+                <a:latin typeface="Calibri"/>
               </a:rPr>
               <a:t>FIND YOUR SHEET FROM LESSON ONE</a:t>
-            </a:r>
-          </a:p>
-        </p:txBody>
-      </p:sp>
-      <p:sp>
-        <p:nvSpPr>
-          <p:cNvPr id="4" name="Rounded Rectangle 3"/>
-          <p:cNvSpPr/>
-          <p:nvPr/>
-        </p:nvSpPr>
-        <p:spPr>
-          <a:xfrm>
-            <a:off x="6976872" y="530352"/>
-            <a:ext cx="1481328" cy="347472"/>
-          </a:xfrm>
-          <a:prstGeom prst="roundRect">
-            <a:avLst>
-              <a:gd name="adj" fmla="val 50000"/>
-            </a:avLst>
-          </a:prstGeom>
-          <a:solidFill>
-            <a:srgbClr val="EEF3F1"/>
-          </a:solidFill>
-          <a:ln>
-            <a:noFill/>
-          </a:ln>
-          <a:effectLst/>
-        </p:spPr>
-        <p:style>
-          <a:lnRef idx="1">
-            <a:schemeClr val="accent1"/>
-          </a:lnRef>
-          <a:fillRef idx="3">
-            <a:schemeClr val="accent1"/>
-          </a:fillRef>
-          <a:effectRef idx="2">
-            <a:schemeClr val="accent1"/>
-          </a:effectRef>
-          <a:fontRef idx="minor">
-            <a:schemeClr val="lt1"/>
-          </a:fontRef>
-        </p:style>
-        <p:txBody>
-          <a:bodyPr rtlCol="0" anchor="ctr"/>
-          <a:lstStyle/>
-          <a:p>
-            <a:pPr algn="ctr"/>
-          </a:p>
-        </p:txBody>
-      </p:sp>
-      <p:sp>
-        <p:nvSpPr>
-          <p:cNvPr id="5" name="TextBox 4"/>
-          <p:cNvSpPr txBox="1"/>
-          <p:nvPr/>
-        </p:nvSpPr>
-        <p:spPr>
-          <a:xfrm>
-            <a:off x="6976872" y="589788"/>
-            <a:ext cx="1481328" cy="237744"/>
-          </a:xfrm>
-          <a:prstGeom prst="rect">
-            <a:avLst/>
-          </a:prstGeom>
-          <a:noFill/>
-        </p:spPr>
-        <p:txBody>
-          <a:bodyPr wrap="square" lIns="0" rIns="0" tIns="0" bIns="0" anchor="t">
-            <a:spAutoFit/>
-          </a:bodyPr>
-          <a:lstStyle/>
-          <a:p>
-            <a:pPr algn="ctr">
-              <a:lnSpc>
-                <a:spcPct val="125000"/>
-              </a:lnSpc>
-              <a:spcAft>
-                <a:spcPts val="0"/>
-              </a:spcAft>
-            </a:pPr>
-            <a:r>
-              <a:rPr sz="1000" b="1" i="0" spc="100">
-                <a:solidFill>
-                  <a:srgbClr val="256B4A"/>
-                </a:solidFill>
-                <a:latin typeface="Karla"/>
-              </a:rPr>
-              <a:t>LOOK BACK</a:t>
             </a:r>
           </a:p>
         </p:txBody>
@@ -4635,11 +4547,11 @@
               </a:spcAft>
             </a:pPr>
             <a:r>
-              <a:rPr sz="3200" b="1" i="0">
+              <a:rPr sz="3200" b="0" i="0">
                 <a:solidFill>
                   <a:srgbClr val="2C3A33"/>
                 </a:solidFill>
-                <a:latin typeface="Libre Caslon Display"/>
+                <a:latin typeface="Georgia"/>
               </a:rPr>
               <a:t>Your very first guess</a:t>
             </a:r>
@@ -4681,7 +4593,7 @@
                 <a:solidFill>
                   <a:srgbClr val="5F6B64"/>
                 </a:solidFill>
-                <a:latin typeface="Karla"/>
+                <a:latin typeface="Calibri"/>
               </a:rPr>
               <a:t>Part one of the lesson sheet, before you knew any of this. Look at what you put first.</a:t>
             </a:r>
@@ -4811,11 +4723,11 @@
               </a:spcAft>
             </a:pPr>
             <a:r>
-              <a:rPr sz="1200" b="1" i="0">
+              <a:rPr sz="1200" b="0" i="0">
                 <a:solidFill>
                   <a:srgbClr val="FFFDF7"/>
                 </a:solidFill>
-                <a:latin typeface="Libre Caslon Display"/>
+                <a:latin typeface="Georgia"/>
               </a:rPr>
               <a:t>1</a:t>
             </a:r>
@@ -4857,7 +4769,7 @@
                 <a:solidFill>
                   <a:srgbClr val="2C3A33"/>
                 </a:solidFill>
-                <a:latin typeface="Karla"/>
+                <a:latin typeface="Calibri"/>
               </a:rPr>
               <a:t>Which one did you rank far too high?</a:t>
             </a:r>
@@ -4987,11 +4899,11 @@
               </a:spcAft>
             </a:pPr>
             <a:r>
-              <a:rPr sz="1200" b="1" i="0">
+              <a:rPr sz="1200" b="0" i="0">
                 <a:solidFill>
                   <a:srgbClr val="FFFDF7"/>
                 </a:solidFill>
-                <a:latin typeface="Libre Caslon Display"/>
+                <a:latin typeface="Georgia"/>
               </a:rPr>
               <a:t>2</a:t>
             </a:r>
@@ -5033,7 +4945,7 @@
                 <a:solidFill>
                   <a:srgbClr val="2C3A33"/>
                 </a:solidFill>
-                <a:latin typeface="Karla"/>
+                <a:latin typeface="Calibri"/>
               </a:rPr>
               <a:t>What do you know now that you did not know then?</a:t>
             </a:r>
@@ -5163,11 +5075,11 @@
               </a:spcAft>
             </a:pPr>
             <a:r>
-              <a:rPr sz="1200" b="1" i="0">
+              <a:rPr sz="1200" b="0" i="0">
                 <a:solidFill>
                   <a:srgbClr val="FFFDF7"/>
                 </a:solidFill>
-                <a:latin typeface="Libre Caslon Display"/>
+                <a:latin typeface="Georgia"/>
               </a:rPr>
               <a:t>3</a:t>
             </a:r>
@@ -5209,7 +5121,7 @@
                 <a:solidFill>
                   <a:srgbClr val="2C3A33"/>
                 </a:solidFill>
-                <a:latin typeface="Karla"/>
+                <a:latin typeface="Calibri"/>
               </a:rPr>
               <a:t>Would your ranking today survive somebody arguing with it?</a:t>
             </a:r>
@@ -5251,7 +5163,7 @@
                 <a:solidFill>
                   <a:srgbClr val="256B4A"/>
                 </a:solidFill>
-                <a:latin typeface="Karla"/>
+                <a:latin typeface="Calibri"/>
               </a:rPr>
               <a:t>In lesson one most of this room ranked the snacks on sugar alone. That is what has changed.</a:t>
             </a:r>
@@ -5317,7 +5229,7 @@
                 <a:solidFill>
                   <a:srgbClr val="98A29B"/>
                 </a:solidFill>
-                <a:latin typeface="Karla"/>
+                <a:latin typeface="Calibri"/>
               </a:rPr>
               <a:t>The Pastoral Guide</a:t>
             </a:r>
@@ -5359,7 +5271,7 @@
                 <a:solidFill>
                   <a:srgbClr val="98A29B"/>
                 </a:solidFill>
-                <a:latin typeface="Karla"/>
+                <a:latin typeface="Calibri"/>
               </a:rPr>
               <a:t>11 / 15</a:t>
             </a:r>
@@ -5463,97 +5375,9 @@
                 <a:solidFill>
                   <a:srgbClr val="CBDFD6"/>
                 </a:solidFill>
-                <a:latin typeface="Karla"/>
+                <a:latin typeface="Calibri"/>
               </a:rPr>
               <a:t>THE BIT THAT ACTUALLY MATTERS</a:t>
-            </a:r>
-          </a:p>
-        </p:txBody>
-      </p:sp>
-      <p:sp>
-        <p:nvSpPr>
-          <p:cNvPr id="4" name="Rounded Rectangle 3"/>
-          <p:cNvSpPr/>
-          <p:nvPr/>
-        </p:nvSpPr>
-        <p:spPr>
-          <a:xfrm>
-            <a:off x="7086600" y="530352"/>
-            <a:ext cx="1371600" cy="347472"/>
-          </a:xfrm>
-          <a:prstGeom prst="roundRect">
-            <a:avLst>
-              <a:gd name="adj" fmla="val 50000"/>
-            </a:avLst>
-          </a:prstGeom>
-          <a:solidFill>
-            <a:srgbClr val="FFFDF7"/>
-          </a:solidFill>
-          <a:ln>
-            <a:noFill/>
-          </a:ln>
-          <a:effectLst/>
-        </p:spPr>
-        <p:style>
-          <a:lnRef idx="1">
-            <a:schemeClr val="accent1"/>
-          </a:lnRef>
-          <a:fillRef idx="3">
-            <a:schemeClr val="accent1"/>
-          </a:fillRef>
-          <a:effectRef idx="2">
-            <a:schemeClr val="accent1"/>
-          </a:effectRef>
-          <a:fontRef idx="minor">
-            <a:schemeClr val="lt1"/>
-          </a:fontRef>
-        </p:style>
-        <p:txBody>
-          <a:bodyPr rtlCol="0" anchor="ctr"/>
-          <a:lstStyle/>
-          <a:p>
-            <a:pPr algn="ctr"/>
-          </a:p>
-        </p:txBody>
-      </p:sp>
-      <p:sp>
-        <p:nvSpPr>
-          <p:cNvPr id="5" name="TextBox 4"/>
-          <p:cNvSpPr txBox="1"/>
-          <p:nvPr/>
-        </p:nvSpPr>
-        <p:spPr>
-          <a:xfrm>
-            <a:off x="7086600" y="589788"/>
-            <a:ext cx="1371600" cy="237744"/>
-          </a:xfrm>
-          <a:prstGeom prst="rect">
-            <a:avLst/>
-          </a:prstGeom>
-          <a:noFill/>
-        </p:spPr>
-        <p:txBody>
-          <a:bodyPr wrap="square" lIns="0" rIns="0" tIns="0" bIns="0" anchor="t">
-            <a:spAutoFit/>
-          </a:bodyPr>
-          <a:lstStyle/>
-          <a:p>
-            <a:pPr algn="ctr">
-              <a:lnSpc>
-                <a:spcPct val="125000"/>
-              </a:lnSpc>
-              <a:spcAft>
-                <a:spcPts val="0"/>
-              </a:spcAft>
-            </a:pPr>
-            <a:r>
-              <a:rPr sz="1000" b="1" i="0" spc="100">
-                <a:solidFill>
-                  <a:srgbClr val="256B4A"/>
-                </a:solidFill>
-                <a:latin typeface="Karla"/>
-              </a:rPr>
-              <a:t>LEARN</a:t>
             </a:r>
           </a:p>
         </p:txBody>
@@ -5589,11 +5413,11 @@
               </a:spcAft>
             </a:pPr>
             <a:r>
-              <a:rPr sz="3300" b="1" i="0">
+              <a:rPr sz="3300" b="0" i="0">
                 <a:solidFill>
                   <a:srgbClr val="FFFDF7"/>
                 </a:solidFill>
-                <a:latin typeface="Libre Caslon Display"/>
+                <a:latin typeface="Georgia"/>
               </a:rPr>
               <a:t>One change, not five</a:t>
             </a:r>
@@ -5683,7 +5507,7 @@
                 <a:solidFill>
                   <a:srgbClr val="256B4A"/>
                 </a:solidFill>
-                <a:latin typeface="Karla"/>
+                <a:latin typeface="Calibri"/>
               </a:rPr>
               <a:t>Pick the one snack you already eat most often.</a:t>
             </a:r>
@@ -5773,7 +5597,7 @@
                 <a:solidFill>
                   <a:srgbClr val="256B4A"/>
                 </a:solidFill>
-                <a:latin typeface="Karla"/>
+                <a:latin typeface="Calibri"/>
               </a:rPr>
               <a:t>Add one thing to it that does one of the four jobs.</a:t>
             </a:r>
@@ -5863,7 +5687,7 @@
                 <a:solidFill>
                   <a:srgbClr val="256B4A"/>
                 </a:solidFill>
-                <a:latin typeface="Karla"/>
+                <a:latin typeface="Calibri"/>
               </a:rPr>
               <a:t>That is the change. Do that, and nothing else.</a:t>
             </a:r>
@@ -5905,7 +5729,7 @@
                 <a:solidFill>
                   <a:srgbClr val="FFFDF7"/>
                 </a:solidFill>
-                <a:latin typeface="Karla"/>
+                <a:latin typeface="Calibri"/>
               </a:rPr>
               <a:t>Nobody changes five things and keeps them. Most people manage one.</a:t>
             </a:r>
@@ -5971,7 +5795,7 @@
                 <a:solidFill>
                   <a:srgbClr val="CBDFD6"/>
                 </a:solidFill>
-                <a:latin typeface="Karla"/>
+                <a:latin typeface="Calibri"/>
               </a:rPr>
               <a:t>The Pastoral Guide</a:t>
             </a:r>
@@ -6013,7 +5837,7 @@
                 <a:solidFill>
                   <a:srgbClr val="CBDFD6"/>
                 </a:solidFill>
-                <a:latin typeface="Karla"/>
+                <a:latin typeface="Calibri"/>
               </a:rPr>
               <a:t>12 / 15</a:t>
             </a:r>
@@ -6117,97 +5941,9 @@
                 <a:solidFill>
                   <a:srgbClr val="256B4A"/>
                 </a:solidFill>
-                <a:latin typeface="Karla"/>
+                <a:latin typeface="Calibri"/>
               </a:rPr>
               <a:t>ON PAPER, THEN KEEP IT</a:t>
-            </a:r>
-          </a:p>
-        </p:txBody>
-      </p:sp>
-      <p:sp>
-        <p:nvSpPr>
-          <p:cNvPr id="4" name="Rounded Rectangle 3"/>
-          <p:cNvSpPr/>
-          <p:nvPr/>
-        </p:nvSpPr>
-        <p:spPr>
-          <a:xfrm>
-            <a:off x="7086600" y="530352"/>
-            <a:ext cx="1371600" cy="347472"/>
-          </a:xfrm>
-          <a:prstGeom prst="roundRect">
-            <a:avLst>
-              <a:gd name="adj" fmla="val 50000"/>
-            </a:avLst>
-          </a:prstGeom>
-          <a:solidFill>
-            <a:srgbClr val="EEF3F1"/>
-          </a:solidFill>
-          <a:ln>
-            <a:noFill/>
-          </a:ln>
-          <a:effectLst/>
-        </p:spPr>
-        <p:style>
-          <a:lnRef idx="1">
-            <a:schemeClr val="accent1"/>
-          </a:lnRef>
-          <a:fillRef idx="3">
-            <a:schemeClr val="accent1"/>
-          </a:fillRef>
-          <a:effectRef idx="2">
-            <a:schemeClr val="accent1"/>
-          </a:effectRef>
-          <a:fontRef idx="minor">
-            <a:schemeClr val="lt1"/>
-          </a:fontRef>
-        </p:style>
-        <p:txBody>
-          <a:bodyPr rtlCol="0" anchor="ctr"/>
-          <a:lstStyle/>
-          <a:p>
-            <a:pPr algn="ctr"/>
-          </a:p>
-        </p:txBody>
-      </p:sp>
-      <p:sp>
-        <p:nvSpPr>
-          <p:cNvPr id="5" name="TextBox 4"/>
-          <p:cNvSpPr txBox="1"/>
-          <p:nvPr/>
-        </p:nvSpPr>
-        <p:spPr>
-          <a:xfrm>
-            <a:off x="7086600" y="589788"/>
-            <a:ext cx="1371600" cy="237744"/>
-          </a:xfrm>
-          <a:prstGeom prst="rect">
-            <a:avLst/>
-          </a:prstGeom>
-          <a:noFill/>
-        </p:spPr>
-        <p:txBody>
-          <a:bodyPr wrap="square" lIns="0" rIns="0" tIns="0" bIns="0" anchor="t">
-            <a:spAutoFit/>
-          </a:bodyPr>
-          <a:lstStyle/>
-          <a:p>
-            <a:pPr algn="ctr">
-              <a:lnSpc>
-                <a:spcPct val="125000"/>
-              </a:lnSpc>
-              <a:spcAft>
-                <a:spcPts val="0"/>
-              </a:spcAft>
-            </a:pPr>
-            <a:r>
-              <a:rPr sz="1000" b="1" i="0" spc="100">
-                <a:solidFill>
-                  <a:srgbClr val="256B4A"/>
-                </a:solidFill>
-                <a:latin typeface="Karla"/>
-              </a:rPr>
-              <a:t>EXIT SLIP</a:t>
             </a:r>
           </a:p>
         </p:txBody>
@@ -6243,11 +5979,11 @@
               </a:spcAft>
             </a:pPr>
             <a:r>
-              <a:rPr sz="3100" b="1" i="0">
+              <a:rPr sz="3100" b="0" i="0">
                 <a:solidFill>
                   <a:srgbClr val="2C3A33"/>
                 </a:solidFill>
-                <a:latin typeface="Libre Caslon Display"/>
+                <a:latin typeface="Georgia"/>
               </a:rPr>
               <a:t>One snack. One addition.</a:t>
             </a:r>
@@ -6289,7 +6025,7 @@
                 <a:solidFill>
                   <a:srgbClr val="5F6B64"/>
                 </a:solidFill>
-                <a:latin typeface="Karla"/>
+                <a:latin typeface="Calibri"/>
               </a:rPr>
               <a:t>Not collected. Put it somewhere you will see it before break tomorrow.</a:t>
             </a:r>
@@ -6375,11 +6111,11 @@
               </a:spcAft>
             </a:pPr>
             <a:r>
-              <a:rPr sz="1350" b="1" i="0">
+              <a:rPr sz="1350" b="0" i="0">
                 <a:solidFill>
                   <a:srgbClr val="256B4A"/>
                 </a:solidFill>
-                <a:latin typeface="Libre Caslon Display"/>
+                <a:latin typeface="Georgia"/>
               </a:rPr>
               <a:t>What I usually have</a:t>
             </a:r>
@@ -6421,7 +6157,7 @@
                 <a:solidFill>
                   <a:srgbClr val="5F6B64"/>
                 </a:solidFill>
-                <a:latin typeface="Karla"/>
+                <a:latin typeface="Calibri"/>
               </a:rPr>
               <a:t>Be honest. The real one, not the impressive one.</a:t>
             </a:r>
@@ -6507,11 +6243,11 @@
               </a:spcAft>
             </a:pPr>
             <a:r>
-              <a:rPr sz="1350" b="1" i="0">
+              <a:rPr sz="1350" b="0" i="0">
                 <a:solidFill>
                   <a:srgbClr val="256B4A"/>
                 </a:solidFill>
-                <a:latin typeface="Libre Caslon Display"/>
+                <a:latin typeface="Georgia"/>
               </a:rPr>
               <a:t>What I am adding</a:t>
             </a:r>
@@ -6553,7 +6289,7 @@
                 <a:solidFill>
                   <a:srgbClr val="5F6B64"/>
                 </a:solidFill>
-                <a:latin typeface="Karla"/>
+                <a:latin typeface="Calibri"/>
               </a:rPr>
               <a:t>One ingredient. It has to be easy to find.</a:t>
             </a:r>
@@ -6639,11 +6375,11 @@
               </a:spcAft>
             </a:pPr>
             <a:r>
-              <a:rPr sz="1350" b="1" i="0">
+              <a:rPr sz="1350" b="0" i="0">
                 <a:solidFill>
                   <a:srgbClr val="256B4A"/>
                 </a:solidFill>
-                <a:latin typeface="Libre Caslon Display"/>
+                <a:latin typeface="Georgia"/>
               </a:rPr>
               <a:t>Which job it does</a:t>
             </a:r>
@@ -6685,7 +6421,7 @@
                 <a:solidFill>
                   <a:srgbClr val="5F6B64"/>
                 </a:solidFill>
-                <a:latin typeface="Karla"/>
+                <a:latin typeface="Calibri"/>
               </a:rPr>
               <a:t>Protein, fibre, slow carb or fat. Pick one.</a:t>
             </a:r>
@@ -6727,7 +6463,7 @@
                 <a:solidFill>
                   <a:srgbClr val="256B4A"/>
                 </a:solidFill>
-                <a:latin typeface="Karla"/>
+                <a:latin typeface="Calibri"/>
               </a:rPr>
               <a:t>If you cannot think of the addition, ask the person next to you what they wrote.</a:t>
             </a:r>
@@ -6793,7 +6529,7 @@
                 <a:solidFill>
                   <a:srgbClr val="98A29B"/>
                 </a:solidFill>
-                <a:latin typeface="Karla"/>
+                <a:latin typeface="Calibri"/>
               </a:rPr>
               <a:t>The Pastoral Guide</a:t>
             </a:r>
@@ -6835,7 +6571,7 @@
                 <a:solidFill>
                   <a:srgbClr val="98A29B"/>
                 </a:solidFill>
-                <a:latin typeface="Karla"/>
+                <a:latin typeface="Calibri"/>
               </a:rPr>
               <a:t>13 / 15</a:t>
             </a:r>
@@ -6939,7 +6675,7 @@
                 <a:solidFill>
                   <a:srgbClr val="CBDFD6"/>
                 </a:solidFill>
-                <a:latin typeface="Karla"/>
+                <a:latin typeface="Calibri"/>
               </a:rPr>
               <a:t>IF YOU REMEMBER ONE THING</a:t>
             </a:r>
@@ -6977,21 +6713,21 @@
               </a:spcAft>
             </a:pPr>
             <a:r>
-              <a:rPr sz="3400" b="1" i="0">
+              <a:rPr sz="3400" b="0" i="0">
                 <a:solidFill>
                   <a:srgbClr val="FFFDF7"/>
                 </a:solidFill>
-                <a:latin typeface="Libre Caslon Display"/>
+                <a:latin typeface="Georgia"/>
               </a:rPr>
               <a:t>The smallest change</a:t>
             </a:r>
             <a:br/>
             <a:r>
-              <a:rPr sz="3400" b="1" i="0">
+              <a:rPr sz="3400" b="0" i="0">
                 <a:solidFill>
                   <a:srgbClr val="FFFDF7"/>
                 </a:solidFill>
-                <a:latin typeface="Libre Caslon Display"/>
+                <a:latin typeface="Georgia"/>
               </a:rPr>
               <a:t>is the one that lasts.</a:t>
             </a:r>
@@ -7077,7 +6813,7 @@
                 <a:solidFill>
                   <a:srgbClr val="CBDFD6"/>
                 </a:solidFill>
-                <a:latin typeface="Karla"/>
+                <a:latin typeface="Calibri"/>
               </a:rPr>
               <a:t>The snack you already have, plus the one thing it is missing.</a:t>
             </a:r>
@@ -7143,7 +6879,7 @@
                 <a:solidFill>
                   <a:srgbClr val="CBDFD6"/>
                 </a:solidFill>
-                <a:latin typeface="Karla"/>
+                <a:latin typeface="Calibri"/>
               </a:rPr>
               <a:t>The Pastoral Guide</a:t>
             </a:r>
@@ -7185,7 +6921,7 @@
                 <a:solidFill>
                   <a:srgbClr val="CBDFD6"/>
                 </a:solidFill>
-                <a:latin typeface="Karla"/>
+                <a:latin typeface="Calibri"/>
               </a:rPr>
               <a:t>14 / 15</a:t>
             </a:r>
@@ -7309,11 +7045,11 @@
               </a:spcAft>
             </a:pPr>
             <a:r>
-              <a:rPr sz="3000" b="1" i="0">
+              <a:rPr sz="3000" b="0" i="0">
                 <a:solidFill>
                   <a:srgbClr val="256B4A"/>
                 </a:solidFill>
-                <a:latin typeface="Libre Caslon Display"/>
+                <a:latin typeface="Georgia"/>
               </a:rPr>
               <a:t>That is the series.</a:t>
             </a:r>
@@ -7355,7 +7091,7 @@
                 <a:solidFill>
                   <a:srgbClr val="5F6B64"/>
                 </a:solidFill>
-                <a:latin typeface="Karla"/>
+                <a:latin typeface="Calibri"/>
               </a:rPr>
               <a:t>Four criteria, one snack you can actually make, and one change worth keeping.</a:t>
             </a:r>
@@ -7397,7 +7133,7 @@
                 <a:solidFill>
                   <a:srgbClr val="98A29B"/>
                 </a:solidFill>
-                <a:latin typeface="Karla"/>
+                <a:latin typeface="Calibri"/>
               </a:rPr>
               <a:t>Fuel and Focus  ·  Lesson 3 of 3</a:t>
             </a:r>
@@ -7463,7 +7199,7 @@
                 <a:solidFill>
                   <a:srgbClr val="98A29B"/>
                 </a:solidFill>
-                <a:latin typeface="Karla"/>
+                <a:latin typeface="Calibri"/>
               </a:rPr>
               <a:t>The Pastoral Guide</a:t>
             </a:r>
@@ -7505,7 +7241,7 @@
                 <a:solidFill>
                   <a:srgbClr val="98A29B"/>
                 </a:solidFill>
-                <a:latin typeface="Karla"/>
+                <a:latin typeface="Calibri"/>
               </a:rPr>
               <a:t>15 / 15</a:t>
             </a:r>
@@ -7655,7 +7391,7 @@
                 <a:solidFill>
                   <a:srgbClr val="256B4A"/>
                 </a:solidFill>
-                <a:latin typeface="Karla"/>
+                <a:latin typeface="Calibri"/>
               </a:rPr>
               <a:t>TEACHER SLIDE  ·  SKIP IT</a:t>
             </a:r>
@@ -7697,7 +7433,7 @@
                 <a:solidFill>
                   <a:srgbClr val="256B4A"/>
                 </a:solidFill>
-                <a:latin typeface="Karla"/>
+                <a:latin typeface="Calibri"/>
               </a:rPr>
               <a:t>TWO DECISIONS BEFORE YOU START</a:t>
             </a:r>
@@ -7735,11 +7471,11 @@
               </a:spcAft>
             </a:pPr>
             <a:r>
-              <a:rPr sz="3100" b="1" i="0">
+              <a:rPr sz="3100" b="0" i="0">
                 <a:solidFill>
                   <a:srgbClr val="2C3A33"/>
                 </a:solidFill>
-                <a:latin typeface="Libre Caslon Display"/>
+                <a:latin typeface="Georgia"/>
               </a:rPr>
               <a:t>Read this one first</a:t>
             </a:r>
@@ -7869,11 +7605,11 @@
               </a:spcAft>
             </a:pPr>
             <a:r>
-              <a:rPr sz="1400" b="1" i="0">
+              <a:rPr sz="1400" b="0" i="0">
                 <a:solidFill>
                   <a:srgbClr val="FFFDF7"/>
                 </a:solidFill>
-                <a:latin typeface="Libre Caslon Display"/>
+                <a:latin typeface="Georgia"/>
               </a:rPr>
               <a:t>1</a:t>
             </a:r>
@@ -7911,11 +7647,11 @@
               </a:spcAft>
             </a:pPr>
             <a:r>
-              <a:rPr sz="1500" b="1" i="0">
+              <a:rPr sz="1500" b="0" i="0">
                 <a:solidFill>
                   <a:srgbClr val="256B4A"/>
                 </a:solidFill>
-                <a:latin typeface="Libre Caslon Display"/>
+                <a:latin typeface="Georgia"/>
               </a:rPr>
               <a:t>Is tasting allowed?</a:t>
             </a:r>
@@ -7957,7 +7693,7 @@
                 <a:solidFill>
                   <a:srgbClr val="5F6B64"/>
                 </a:solidFill>
-                <a:latin typeface="Karla"/>
+                <a:latin typeface="Calibri"/>
               </a:rPr>
               <a:t>Many schools do not permit food brought from home to be shared. If yours does not, run Option B on slide 10 instead of Option A on slide 9.</a:t>
             </a:r>
@@ -8087,11 +7823,11 @@
               </a:spcAft>
             </a:pPr>
             <a:r>
-              <a:rPr sz="1400" b="1" i="0">
+              <a:rPr sz="1400" b="0" i="0">
                 <a:solidFill>
                   <a:srgbClr val="FFFDF7"/>
                 </a:solidFill>
-                <a:latin typeface="Libre Caslon Display"/>
+                <a:latin typeface="Georgia"/>
               </a:rPr>
               <a:t>2</a:t>
             </a:r>
@@ -8129,11 +7865,11 @@
               </a:spcAft>
             </a:pPr>
             <a:r>
-              <a:rPr sz="1500" b="1" i="0">
+              <a:rPr sz="1500" b="0" i="0">
                 <a:solidFill>
                   <a:srgbClr val="256B4A"/>
                 </a:solidFill>
-                <a:latin typeface="Libre Caslon Display"/>
+                <a:latin typeface="Georgia"/>
               </a:rPr>
               <a:t>Who has nothing?</a:t>
             </a:r>
@@ -8175,7 +7911,7 @@
                 <a:solidFill>
                   <a:srgbClr val="5F6B64"/>
                 </a:solidFill>
-                <a:latin typeface="Karla"/>
+                <a:latin typeface="Calibri"/>
               </a:rPr>
               <a:t>Some will not have made anything, and the reasons are rarely about effort. The card alone is the homework, and the slides say so.</a:t>
             </a:r>
@@ -8217,7 +7953,7 @@
                 <a:solidFill>
                   <a:srgbClr val="256B4A"/>
                 </a:solidFill>
-                <a:latin typeface="Karla"/>
+                <a:latin typeface="Calibri"/>
               </a:rPr>
               <a:t>Spare cards and a few spare ingredients cover almost every version of this.</a:t>
             </a:r>
@@ -8283,7 +8019,7 @@
                 <a:solidFill>
                   <a:srgbClr val="98A29B"/>
                 </a:solidFill>
-                <a:latin typeface="Karla"/>
+                <a:latin typeface="Calibri"/>
               </a:rPr>
               <a:t>The Pastoral Guide</a:t>
             </a:r>
@@ -8325,7 +8061,7 @@
                 <a:solidFill>
                   <a:srgbClr val="98A29B"/>
                 </a:solidFill>
-                <a:latin typeface="Karla"/>
+                <a:latin typeface="Calibri"/>
               </a:rPr>
               <a:t>2 / 15</a:t>
             </a:r>
@@ -8429,97 +8165,9 @@
                 <a:solidFill>
                   <a:srgbClr val="CBDFD6"/>
                 </a:solidFill>
-                <a:latin typeface="Karla"/>
+                <a:latin typeface="Calibri"/>
               </a:rPr>
               <a:t>THE TEST, ONE MORE TIME</a:t>
-            </a:r>
-          </a:p>
-        </p:txBody>
-      </p:sp>
-      <p:sp>
-        <p:nvSpPr>
-          <p:cNvPr id="4" name="Rounded Rectangle 3"/>
-          <p:cNvSpPr/>
-          <p:nvPr/>
-        </p:nvSpPr>
-        <p:spPr>
-          <a:xfrm>
-            <a:off x="7086600" y="530352"/>
-            <a:ext cx="1371600" cy="347472"/>
-          </a:xfrm>
-          <a:prstGeom prst="roundRect">
-            <a:avLst>
-              <a:gd name="adj" fmla="val 50000"/>
-            </a:avLst>
-          </a:prstGeom>
-          <a:solidFill>
-            <a:srgbClr val="FFFDF7"/>
-          </a:solidFill>
-          <a:ln>
-            <a:noFill/>
-          </a:ln>
-          <a:effectLst/>
-        </p:spPr>
-        <p:style>
-          <a:lnRef idx="1">
-            <a:schemeClr val="accent1"/>
-          </a:lnRef>
-          <a:fillRef idx="3">
-            <a:schemeClr val="accent1"/>
-          </a:fillRef>
-          <a:effectRef idx="2">
-            <a:schemeClr val="accent1"/>
-          </a:effectRef>
-          <a:fontRef idx="minor">
-            <a:schemeClr val="lt1"/>
-          </a:fontRef>
-        </p:style>
-        <p:txBody>
-          <a:bodyPr rtlCol="0" anchor="ctr"/>
-          <a:lstStyle/>
-          <a:p>
-            <a:pPr algn="ctr"/>
-          </a:p>
-        </p:txBody>
-      </p:sp>
-      <p:sp>
-        <p:nvSpPr>
-          <p:cNvPr id="5" name="TextBox 4"/>
-          <p:cNvSpPr txBox="1"/>
-          <p:nvPr/>
-        </p:nvSpPr>
-        <p:spPr>
-          <a:xfrm>
-            <a:off x="7086600" y="589788"/>
-            <a:ext cx="1371600" cy="237744"/>
-          </a:xfrm>
-          <a:prstGeom prst="rect">
-            <a:avLst/>
-          </a:prstGeom>
-          <a:noFill/>
-        </p:spPr>
-        <p:txBody>
-          <a:bodyPr wrap="square" lIns="0" rIns="0" tIns="0" bIns="0" anchor="t">
-            <a:spAutoFit/>
-          </a:bodyPr>
-          <a:lstStyle/>
-          <a:p>
-            <a:pPr algn="ctr">
-              <a:lnSpc>
-                <a:spcPct val="125000"/>
-              </a:lnSpc>
-              <a:spcAft>
-                <a:spcPts val="0"/>
-              </a:spcAft>
-            </a:pPr>
-            <a:r>
-              <a:rPr sz="1000" b="1" i="0" spc="100">
-                <a:solidFill>
-                  <a:srgbClr val="256B4A"/>
-                </a:solidFill>
-                <a:latin typeface="Karla"/>
-              </a:rPr>
-              <a:t>RECAP</a:t>
             </a:r>
           </a:p>
         </p:txBody>
@@ -8555,11 +8203,11 @@
               </a:spcAft>
             </a:pPr>
             <a:r>
-              <a:rPr sz="3100" b="1" i="0">
+              <a:rPr sz="3100" b="0" i="0">
                 <a:solidFill>
                   <a:srgbClr val="FFFDF7"/>
                 </a:solidFill>
-                <a:latin typeface="Libre Caslon Display"/>
+                <a:latin typeface="Georgia"/>
               </a:rPr>
               <a:t>All four, or it does not count</a:t>
             </a:r>
@@ -8689,11 +8337,11 @@
               </a:spcAft>
             </a:pPr>
             <a:r>
-              <a:rPr sz="1300" b="1" i="0">
+              <a:rPr sz="1300" b="0" i="0">
                 <a:solidFill>
                   <a:srgbClr val="FFFDF7"/>
                 </a:solidFill>
-                <a:latin typeface="Libre Caslon Display"/>
+                <a:latin typeface="Georgia"/>
               </a:rPr>
               <a:t>1</a:t>
             </a:r>
@@ -8731,11 +8379,11 @@
               </a:spcAft>
             </a:pPr>
             <a:r>
-              <a:rPr sz="1500" b="1" i="0">
+              <a:rPr sz="1500" b="0" i="0">
                 <a:solidFill>
                   <a:srgbClr val="256B4A"/>
                 </a:solidFill>
-                <a:latin typeface="Libre Caslon Display"/>
+                <a:latin typeface="Georgia"/>
               </a:rPr>
               <a:t>Protein</a:t>
             </a:r>
@@ -8777,7 +8425,7 @@
                 <a:solidFill>
                   <a:srgbClr val="5F6B64"/>
                 </a:solidFill>
-                <a:latin typeface="Karla"/>
+                <a:latin typeface="Calibri"/>
               </a:rPr>
               <a:t>Slows the whole thing down, and keeps you full.</a:t>
             </a:r>
@@ -8907,11 +8555,11 @@
               </a:spcAft>
             </a:pPr>
             <a:r>
-              <a:rPr sz="1300" b="1" i="0">
+              <a:rPr sz="1300" b="0" i="0">
                 <a:solidFill>
                   <a:srgbClr val="FFFDF7"/>
                 </a:solidFill>
-                <a:latin typeface="Libre Caslon Display"/>
+                <a:latin typeface="Georgia"/>
               </a:rPr>
               <a:t>2</a:t>
             </a:r>
@@ -8949,11 +8597,11 @@
               </a:spcAft>
             </a:pPr>
             <a:r>
-              <a:rPr sz="1500" b="1" i="0">
+              <a:rPr sz="1500" b="0" i="0">
                 <a:solidFill>
                   <a:srgbClr val="256B4A"/>
                 </a:solidFill>
-                <a:latin typeface="Libre Caslon Display"/>
+                <a:latin typeface="Georgia"/>
               </a:rPr>
               <a:t>Fibre</a:t>
             </a:r>
@@ -8995,7 +8643,7 @@
                 <a:solidFill>
                   <a:srgbClr val="5F6B64"/>
                 </a:solidFill>
-                <a:latin typeface="Karla"/>
+                <a:latin typeface="Calibri"/>
               </a:rPr>
               <a:t>Slows the food down in your gut, so the glucose arrives gradually.</a:t>
             </a:r>
@@ -9125,11 +8773,11 @@
               </a:spcAft>
             </a:pPr>
             <a:r>
-              <a:rPr sz="1300" b="1" i="0">
+              <a:rPr sz="1300" b="0" i="0">
                 <a:solidFill>
                   <a:srgbClr val="FFFDF7"/>
                 </a:solidFill>
-                <a:latin typeface="Libre Caslon Display"/>
+                <a:latin typeface="Georgia"/>
               </a:rPr>
               <a:t>3</a:t>
             </a:r>
@@ -9167,11 +8815,11 @@
               </a:spcAft>
             </a:pPr>
             <a:r>
-              <a:rPr sz="1500" b="1" i="0">
+              <a:rPr sz="1500" b="0" i="0">
                 <a:solidFill>
                   <a:srgbClr val="256B4A"/>
                 </a:solidFill>
-                <a:latin typeface="Libre Caslon Display"/>
+                <a:latin typeface="Georgia"/>
               </a:rPr>
               <a:t>A slow carb</a:t>
             </a:r>
@@ -9213,7 +8861,7 @@
                 <a:solidFill>
                   <a:srgbClr val="5F6B64"/>
                 </a:solidFill>
-                <a:latin typeface="Karla"/>
+                <a:latin typeface="Calibri"/>
               </a:rPr>
               <a:t>Oats, wholegrain or whole fruit. Not white and not sugary.</a:t>
             </a:r>
@@ -9343,11 +8991,11 @@
               </a:spcAft>
             </a:pPr>
             <a:r>
-              <a:rPr sz="1300" b="1" i="0">
+              <a:rPr sz="1300" b="0" i="0">
                 <a:solidFill>
                   <a:srgbClr val="FFFDF7"/>
                 </a:solidFill>
-                <a:latin typeface="Libre Caslon Display"/>
+                <a:latin typeface="Georgia"/>
               </a:rPr>
               <a:t>4</a:t>
             </a:r>
@@ -9385,11 +9033,11 @@
               </a:spcAft>
             </a:pPr>
             <a:r>
-              <a:rPr sz="1500" b="1" i="0">
+              <a:rPr sz="1500" b="0" i="0">
                 <a:solidFill>
                   <a:srgbClr val="256B4A"/>
                 </a:solidFill>
-                <a:latin typeface="Libre Caslon Display"/>
+                <a:latin typeface="Georgia"/>
               </a:rPr>
               <a:t>Healthy fats</a:t>
             </a:r>
@@ -9431,7 +9079,7 @@
                 <a:solidFill>
                   <a:srgbClr val="5F6B64"/>
                 </a:solidFill>
-                <a:latin typeface="Karla"/>
+                <a:latin typeface="Calibri"/>
               </a:rPr>
               <a:t>Slows the stomach down, and carries the most energy per gram. Seeds, nuts, avocado.</a:t>
             </a:r>
@@ -9473,7 +9121,7 @@
                 <a:solidFill>
                   <a:srgbClr val="FFFDF7"/>
                 </a:solidFill>
-                <a:latin typeface="Karla"/>
+                <a:latin typeface="Calibri"/>
               </a:rPr>
               <a:t>Plus the fifth one nobody wrote down: would you actually choose it?</a:t>
             </a:r>
@@ -9539,7 +9187,7 @@
                 <a:solidFill>
                   <a:srgbClr val="CBDFD6"/>
                 </a:solidFill>
-                <a:latin typeface="Karla"/>
+                <a:latin typeface="Calibri"/>
               </a:rPr>
               <a:t>The Pastoral Guide</a:t>
             </a:r>
@@ -9581,7 +9229,7 @@
                 <a:solidFill>
                   <a:srgbClr val="CBDFD6"/>
                 </a:solidFill>
-                <a:latin typeface="Karla"/>
+                <a:latin typeface="Calibri"/>
               </a:rPr>
               <a:t>3 / 15</a:t>
             </a:r>
@@ -9685,97 +9333,9 @@
                 <a:solidFill>
                   <a:srgbClr val="256B4A"/>
                 </a:solidFill>
-                <a:latin typeface="Karla"/>
+                <a:latin typeface="Calibri"/>
               </a:rPr>
               <a:t>CARDS OUT</a:t>
-            </a:r>
-          </a:p>
-        </p:txBody>
-      </p:sp>
-      <p:sp>
-        <p:nvSpPr>
-          <p:cNvPr id="4" name="Rounded Rectangle 3"/>
-          <p:cNvSpPr/>
-          <p:nvPr/>
-        </p:nvSpPr>
-        <p:spPr>
-          <a:xfrm>
-            <a:off x="7086600" y="530352"/>
-            <a:ext cx="1371600" cy="347472"/>
-          </a:xfrm>
-          <a:prstGeom prst="roundRect">
-            <a:avLst>
-              <a:gd name="adj" fmla="val 50000"/>
-            </a:avLst>
-          </a:prstGeom>
-          <a:solidFill>
-            <a:srgbClr val="EEF3F1"/>
-          </a:solidFill>
-          <a:ln>
-            <a:noFill/>
-          </a:ln>
-          <a:effectLst/>
-        </p:spPr>
-        <p:style>
-          <a:lnRef idx="1">
-            <a:schemeClr val="accent1"/>
-          </a:lnRef>
-          <a:fillRef idx="3">
-            <a:schemeClr val="accent1"/>
-          </a:fillRef>
-          <a:effectRef idx="2">
-            <a:schemeClr val="accent1"/>
-          </a:effectRef>
-          <a:fontRef idx="minor">
-            <a:schemeClr val="lt1"/>
-          </a:fontRef>
-        </p:style>
-        <p:txBody>
-          <a:bodyPr rtlCol="0" anchor="ctr"/>
-          <a:lstStyle/>
-          <a:p>
-            <a:pPr algn="ctr"/>
-          </a:p>
-        </p:txBody>
-      </p:sp>
-      <p:sp>
-        <p:nvSpPr>
-          <p:cNvPr id="5" name="TextBox 4"/>
-          <p:cNvSpPr txBox="1"/>
-          <p:nvPr/>
-        </p:nvSpPr>
-        <p:spPr>
-          <a:xfrm>
-            <a:off x="7086600" y="589788"/>
-            <a:ext cx="1371600" cy="237744"/>
-          </a:xfrm>
-          <a:prstGeom prst="rect">
-            <a:avLst/>
-          </a:prstGeom>
-          <a:noFill/>
-        </p:spPr>
-        <p:txBody>
-          <a:bodyPr wrap="square" lIns="0" rIns="0" tIns="0" bIns="0" anchor="t">
-            <a:spAutoFit/>
-          </a:bodyPr>
-          <a:lstStyle/>
-          <a:p>
-            <a:pPr algn="ctr">
-              <a:lnSpc>
-                <a:spcPct val="125000"/>
-              </a:lnSpc>
-              <a:spcAft>
-                <a:spcPts val="0"/>
-              </a:spcAft>
-            </a:pPr>
-            <a:r>
-              <a:rPr sz="1000" b="1" i="0" spc="100">
-                <a:solidFill>
-                  <a:srgbClr val="256B4A"/>
-                </a:solidFill>
-                <a:latin typeface="Karla"/>
-              </a:rPr>
-              <a:t>SET UP</a:t>
             </a:r>
           </a:p>
         </p:txBody>
@@ -9811,11 +9371,11 @@
               </a:spcAft>
             </a:pPr>
             <a:r>
-              <a:rPr sz="3100" b="1" i="0">
+              <a:rPr sz="3100" b="0" i="0">
                 <a:solidFill>
                   <a:srgbClr val="2C3A33"/>
                 </a:solidFill>
-                <a:latin typeface="Libre Caslon Display"/>
+                <a:latin typeface="Georgia"/>
               </a:rPr>
               <a:t>Recipe card on the desk</a:t>
             </a:r>
@@ -9905,7 +9465,7 @@
                 <a:solidFill>
                   <a:srgbClr val="2C3A33"/>
                 </a:solidFill>
-                <a:latin typeface="Karla"/>
+                <a:latin typeface="Calibri"/>
               </a:rPr>
               <a:t>Card face up, name on it, in front of you.</a:t>
             </a:r>
@@ -9995,7 +9555,7 @@
                 <a:solidFill>
                   <a:srgbClr val="2C3A33"/>
                 </a:solidFill>
-                <a:latin typeface="Karla"/>
+                <a:latin typeface="Calibri"/>
               </a:rPr>
               <a:t>No card? Take a blank one and write it now. There is time.</a:t>
             </a:r>
@@ -10085,7 +9645,7 @@
                 <a:solidFill>
                   <a:srgbClr val="2C3A33"/>
                 </a:solidFill>
-                <a:latin typeface="Karla"/>
+                <a:latin typeface="Calibri"/>
               </a:rPr>
               <a:t>You are about to hand it to somebody who has never seen it.</a:t>
             </a:r>
@@ -10127,7 +9687,7 @@
                 <a:solidFill>
                   <a:srgbClr val="256B4A"/>
                 </a:solidFill>
-                <a:latin typeface="Karla"/>
+                <a:latin typeface="Calibri"/>
               </a:rPr>
               <a:t>Nobody is marked on whether they made it at home. The recipe card is the work.</a:t>
             </a:r>
@@ -10193,7 +9753,7 @@
                 <a:solidFill>
                   <a:srgbClr val="98A29B"/>
                 </a:solidFill>
-                <a:latin typeface="Karla"/>
+                <a:latin typeface="Calibri"/>
               </a:rPr>
               <a:t>The Pastoral Guide</a:t>
             </a:r>
@@ -10235,7 +9795,7 @@
                 <a:solidFill>
                   <a:srgbClr val="98A29B"/>
                 </a:solidFill>
-                <a:latin typeface="Karla"/>
+                <a:latin typeface="Calibri"/>
               </a:rPr>
               <a:t>4 / 15</a:t>
             </a:r>
@@ -10339,97 +9899,9 @@
                 <a:solidFill>
                   <a:srgbClr val="256B4A"/>
                 </a:solidFill>
-                <a:latin typeface="Karla"/>
+                <a:latin typeface="Calibri"/>
               </a:rPr>
               <a:t>MARK ONE TOGETHER FIRST</a:t>
-            </a:r>
-          </a:p>
-        </p:txBody>
-      </p:sp>
-      <p:sp>
-        <p:nvSpPr>
-          <p:cNvPr id="4" name="Rounded Rectangle 3"/>
-          <p:cNvSpPr/>
-          <p:nvPr/>
-        </p:nvSpPr>
-        <p:spPr>
-          <a:xfrm>
-            <a:off x="7086600" y="530352"/>
-            <a:ext cx="1371600" cy="347472"/>
-          </a:xfrm>
-          <a:prstGeom prst="roundRect">
-            <a:avLst>
-              <a:gd name="adj" fmla="val 50000"/>
-            </a:avLst>
-          </a:prstGeom>
-          <a:solidFill>
-            <a:srgbClr val="EEF3F1"/>
-          </a:solidFill>
-          <a:ln>
-            <a:noFill/>
-          </a:ln>
-          <a:effectLst/>
-        </p:spPr>
-        <p:style>
-          <a:lnRef idx="1">
-            <a:schemeClr val="accent1"/>
-          </a:lnRef>
-          <a:fillRef idx="3">
-            <a:schemeClr val="accent1"/>
-          </a:fillRef>
-          <a:effectRef idx="2">
-            <a:schemeClr val="accent1"/>
-          </a:effectRef>
-          <a:fontRef idx="minor">
-            <a:schemeClr val="lt1"/>
-          </a:fontRef>
-        </p:style>
-        <p:txBody>
-          <a:bodyPr rtlCol="0" anchor="ctr"/>
-          <a:lstStyle/>
-          <a:p>
-            <a:pPr algn="ctr"/>
-          </a:p>
-        </p:txBody>
-      </p:sp>
-      <p:sp>
-        <p:nvSpPr>
-          <p:cNvPr id="5" name="TextBox 4"/>
-          <p:cNvSpPr txBox="1"/>
-          <p:nvPr/>
-        </p:nvSpPr>
-        <p:spPr>
-          <a:xfrm>
-            <a:off x="7086600" y="589788"/>
-            <a:ext cx="1371600" cy="237744"/>
-          </a:xfrm>
-          <a:prstGeom prst="rect">
-            <a:avLst/>
-          </a:prstGeom>
-          <a:noFill/>
-        </p:spPr>
-        <p:txBody>
-          <a:bodyPr wrap="square" lIns="0" rIns="0" tIns="0" bIns="0" anchor="t">
-            <a:spAutoFit/>
-          </a:bodyPr>
-          <a:lstStyle/>
-          <a:p>
-            <a:pPr algn="ctr">
-              <a:lnSpc>
-                <a:spcPct val="125000"/>
-              </a:lnSpc>
-              <a:spcAft>
-                <a:spcPts val="0"/>
-              </a:spcAft>
-            </a:pPr>
-            <a:r>
-              <a:rPr sz="1000" b="1" i="0" spc="100">
-                <a:solidFill>
-                  <a:srgbClr val="256B4A"/>
-                </a:solidFill>
-                <a:latin typeface="Karla"/>
-              </a:rPr>
-              <a:t>MODEL</a:t>
             </a:r>
           </a:p>
         </p:txBody>
@@ -10465,11 +9937,11 @@
               </a:spcAft>
             </a:pPr>
             <a:r>
-              <a:rPr sz="3200" b="1" i="0">
+              <a:rPr sz="3200" b="0" i="0">
                 <a:solidFill>
                   <a:srgbClr val="2C3A33"/>
                 </a:solidFill>
-                <a:latin typeface="Libre Caslon Display"/>
+                <a:latin typeface="Georgia"/>
               </a:rPr>
               <a:t>Try it on this one</a:t>
             </a:r>
@@ -10555,11 +10027,11 @@
               </a:spcAft>
             </a:pPr>
             <a:r>
-              <a:rPr sz="1500" b="1" i="0">
+              <a:rPr sz="1500" b="0" i="0">
                 <a:solidFill>
                   <a:srgbClr val="256B4A"/>
                 </a:solidFill>
-                <a:latin typeface="Libre Caslon Display"/>
+                <a:latin typeface="Georgia"/>
               </a:rPr>
               <a:t>“White toast with jam, and a glass of orange juice.”</a:t>
             </a:r>
@@ -10645,11 +10117,11 @@
               </a:spcAft>
             </a:pPr>
             <a:r>
-              <a:rPr sz="1200" b="1" i="0">
+              <a:rPr sz="1200" b="0" i="0">
                 <a:solidFill>
                   <a:srgbClr val="256B4A"/>
                 </a:solidFill>
-                <a:latin typeface="Libre Caslon Display"/>
+                <a:latin typeface="Georgia"/>
               </a:rPr>
               <a:t>Protein?</a:t>
             </a:r>
@@ -10691,7 +10163,7 @@
                 <a:solidFill>
                   <a:srgbClr val="5F6B64"/>
                 </a:solidFill>
-                <a:latin typeface="Karla"/>
+                <a:latin typeface="Calibri"/>
               </a:rPr>
               <a:t>Almost none. There is very little in jam or in juice.</a:t>
             </a:r>
@@ -10777,11 +10249,11 @@
               </a:spcAft>
             </a:pPr>
             <a:r>
-              <a:rPr sz="1200" b="1" i="0">
+              <a:rPr sz="1200" b="0" i="0">
                 <a:solidFill>
                   <a:srgbClr val="256B4A"/>
                 </a:solidFill>
-                <a:latin typeface="Libre Caslon Display"/>
+                <a:latin typeface="Georgia"/>
               </a:rPr>
               <a:t>Fibre?</a:t>
             </a:r>
@@ -10823,7 +10295,7 @@
                 <a:solidFill>
                   <a:srgbClr val="5F6B64"/>
                 </a:solidFill>
-                <a:latin typeface="Karla"/>
+                <a:latin typeface="Calibri"/>
               </a:rPr>
               <a:t>Very little from white bread. Almost none from the juice.</a:t>
             </a:r>
@@ -10909,11 +10381,11 @@
               </a:spcAft>
             </a:pPr>
             <a:r>
-              <a:rPr sz="1200" b="1" i="0">
+              <a:rPr sz="1200" b="0" i="0">
                 <a:solidFill>
                   <a:srgbClr val="256B4A"/>
                 </a:solidFill>
-                <a:latin typeface="Libre Caslon Display"/>
+                <a:latin typeface="Georgia"/>
               </a:rPr>
               <a:t>Slow carb?</a:t>
             </a:r>
@@ -10955,7 +10427,7 @@
                 <a:solidFill>
                   <a:srgbClr val="5F6B64"/>
                 </a:solidFill>
-                <a:latin typeface="Karla"/>
+                <a:latin typeface="Calibri"/>
               </a:rPr>
               <a:t>No. White bread and juice are about as fast as it gets.</a:t>
             </a:r>
@@ -11041,11 +10513,11 @@
               </a:spcAft>
             </a:pPr>
             <a:r>
-              <a:rPr sz="1200" b="1" i="0">
+              <a:rPr sz="1200" b="0" i="0">
                 <a:solidFill>
                   <a:srgbClr val="256B4A"/>
                 </a:solidFill>
-                <a:latin typeface="Libre Caslon Display"/>
+                <a:latin typeface="Georgia"/>
               </a:rPr>
               <a:t>Healthy fats?</a:t>
             </a:r>
@@ -11087,7 +10559,7 @@
                 <a:solidFill>
                   <a:srgbClr val="5F6B64"/>
                 </a:solidFill>
-                <a:latin typeface="Karla"/>
+                <a:latin typeface="Calibri"/>
               </a:rPr>
               <a:t>None at all. Nothing here is doing that job.</a:t>
             </a:r>
@@ -11129,7 +10601,7 @@
                 <a:solidFill>
                   <a:srgbClr val="256B4A"/>
                 </a:solidFill>
-                <a:latin typeface="Karla"/>
+                <a:latin typeface="Calibri"/>
               </a:rPr>
               <a:t>One change fixes three of them at once: swap the jam for nut or seed butter.</a:t>
             </a:r>
@@ -11195,7 +10667,7 @@
                 <a:solidFill>
                   <a:srgbClr val="98A29B"/>
                 </a:solidFill>
-                <a:latin typeface="Karla"/>
+                <a:latin typeface="Calibri"/>
               </a:rPr>
               <a:t>The Pastoral Guide</a:t>
             </a:r>
@@ -11237,7 +10709,7 @@
                 <a:solidFill>
                   <a:srgbClr val="98A29B"/>
                 </a:solidFill>
-                <a:latin typeface="Karla"/>
+                <a:latin typeface="Calibri"/>
               </a:rPr>
               <a:t>5 / 15</a:t>
             </a:r>
@@ -11341,97 +10813,9 @@
                 <a:solidFill>
                   <a:srgbClr val="CBDFD6"/>
                 </a:solidFill>
-                <a:latin typeface="Karla"/>
+                <a:latin typeface="Calibri"/>
               </a:rPr>
               <a:t>PASS IT TWO TABLES ALONG</a:t>
-            </a:r>
-          </a:p>
-        </p:txBody>
-      </p:sp>
-      <p:sp>
-        <p:nvSpPr>
-          <p:cNvPr id="4" name="Rounded Rectangle 3"/>
-          <p:cNvSpPr/>
-          <p:nvPr/>
-        </p:nvSpPr>
-        <p:spPr>
-          <a:xfrm>
-            <a:off x="7086600" y="530352"/>
-            <a:ext cx="1371600" cy="347472"/>
-          </a:xfrm>
-          <a:prstGeom prst="roundRect">
-            <a:avLst>
-              <a:gd name="adj" fmla="val 50000"/>
-            </a:avLst>
-          </a:prstGeom>
-          <a:solidFill>
-            <a:srgbClr val="FFFDF7"/>
-          </a:solidFill>
-          <a:ln>
-            <a:noFill/>
-          </a:ln>
-          <a:effectLst/>
-        </p:spPr>
-        <p:style>
-          <a:lnRef idx="1">
-            <a:schemeClr val="accent1"/>
-          </a:lnRef>
-          <a:fillRef idx="3">
-            <a:schemeClr val="accent1"/>
-          </a:fillRef>
-          <a:effectRef idx="2">
-            <a:schemeClr val="accent1"/>
-          </a:effectRef>
-          <a:fontRef idx="minor">
-            <a:schemeClr val="lt1"/>
-          </a:fontRef>
-        </p:style>
-        <p:txBody>
-          <a:bodyPr rtlCol="0" anchor="ctr"/>
-          <a:lstStyle/>
-          <a:p>
-            <a:pPr algn="ctr"/>
-          </a:p>
-        </p:txBody>
-      </p:sp>
-      <p:sp>
-        <p:nvSpPr>
-          <p:cNvPr id="5" name="TextBox 4"/>
-          <p:cNvSpPr txBox="1"/>
-          <p:nvPr/>
-        </p:nvSpPr>
-        <p:spPr>
-          <a:xfrm>
-            <a:off x="7086600" y="589788"/>
-            <a:ext cx="1371600" cy="237744"/>
-          </a:xfrm>
-          <a:prstGeom prst="rect">
-            <a:avLst/>
-          </a:prstGeom>
-          <a:noFill/>
-        </p:spPr>
-        <p:txBody>
-          <a:bodyPr wrap="square" lIns="0" rIns="0" tIns="0" bIns="0" anchor="t">
-            <a:spAutoFit/>
-          </a:bodyPr>
-          <a:lstStyle/>
-          <a:p>
-            <a:pPr algn="ctr">
-              <a:lnSpc>
-                <a:spcPct val="125000"/>
-              </a:lnSpc>
-              <a:spcAft>
-                <a:spcPts val="0"/>
-              </a:spcAft>
-            </a:pPr>
-            <a:r>
-              <a:rPr sz="1000" b="1" i="0" spc="100">
-                <a:solidFill>
-                  <a:srgbClr val="256B4A"/>
-                </a:solidFill>
-                <a:latin typeface="Karla"/>
-              </a:rPr>
-              <a:t>SWAP</a:t>
             </a:r>
           </a:p>
         </p:txBody>
@@ -11467,11 +10851,11 @@
               </a:spcAft>
             </a:pPr>
             <a:r>
-              <a:rPr sz="3300" b="1" i="0">
+              <a:rPr sz="3300" b="0" i="0">
                 <a:solidFill>
                   <a:srgbClr val="FFFDF7"/>
                 </a:solidFill>
-                <a:latin typeface="Libre Caslon Display"/>
+                <a:latin typeface="Georgia"/>
               </a:rPr>
               <a:t>Mark it against the four</a:t>
             </a:r>
@@ -11601,11 +10985,11 @@
               </a:spcAft>
             </a:pPr>
             <a:r>
-              <a:rPr sz="1150" b="1" i="0">
+              <a:rPr sz="1150" b="0" i="0">
                 <a:solidFill>
                   <a:srgbClr val="FFFDF7"/>
                 </a:solidFill>
-                <a:latin typeface="Libre Caslon Display"/>
+                <a:latin typeface="Georgia"/>
               </a:rPr>
               <a:t>1</a:t>
             </a:r>
@@ -11647,7 +11031,7 @@
                 <a:solidFill>
                   <a:srgbClr val="256B4A"/>
                 </a:solidFill>
-                <a:latin typeface="Karla"/>
+                <a:latin typeface="Calibri"/>
               </a:rPr>
               <a:t>Tick each criterion you can actually find an ingredient for.</a:t>
             </a:r>
@@ -11777,11 +11161,11 @@
               </a:spcAft>
             </a:pPr>
             <a:r>
-              <a:rPr sz="1150" b="1" i="0">
+              <a:rPr sz="1150" b="0" i="0">
                 <a:solidFill>
                   <a:srgbClr val="FFFDF7"/>
                 </a:solidFill>
-                <a:latin typeface="Libre Caslon Display"/>
+                <a:latin typeface="Georgia"/>
               </a:rPr>
               <a:t>2</a:t>
             </a:r>
@@ -11823,7 +11207,7 @@
                 <a:solidFill>
                   <a:srgbClr val="256B4A"/>
                 </a:solidFill>
-                <a:latin typeface="Karla"/>
+                <a:latin typeface="Calibri"/>
               </a:rPr>
               <a:t>Write the one change that would make it better.</a:t>
             </a:r>
@@ -11953,11 +11337,11 @@
               </a:spcAft>
             </a:pPr>
             <a:r>
-              <a:rPr sz="1150" b="1" i="0">
+              <a:rPr sz="1150" b="0" i="0">
                 <a:solidFill>
                   <a:srgbClr val="FFFDF7"/>
                 </a:solidFill>
-                <a:latin typeface="Libre Caslon Display"/>
+                <a:latin typeface="Georgia"/>
               </a:rPr>
               <a:t>3</a:t>
             </a:r>
@@ -11999,7 +11383,7 @@
                 <a:solidFill>
                   <a:srgbClr val="256B4A"/>
                 </a:solidFill>
-                <a:latin typeface="Karla"/>
+                <a:latin typeface="Calibri"/>
               </a:rPr>
               <a:t>Then the honest question: would you eat this?</a:t>
             </a:r>
@@ -12041,7 +11425,7 @@
                 <a:solidFill>
                   <a:srgbClr val="CBDFD6"/>
                 </a:solidFill>
-                <a:latin typeface="Karla"/>
+                <a:latin typeface="Calibri"/>
               </a:rPr>
               <a:t>Marking a recipe is not the same as judging the person. Say what you would change.</a:t>
             </a:r>
@@ -12107,7 +11491,7 @@
                 <a:solidFill>
                   <a:srgbClr val="CBDFD6"/>
                 </a:solidFill>
-                <a:latin typeface="Karla"/>
+                <a:latin typeface="Calibri"/>
               </a:rPr>
               <a:t>The Pastoral Guide</a:t>
             </a:r>
@@ -12149,7 +11533,7 @@
                 <a:solidFill>
                   <a:srgbClr val="CBDFD6"/>
                 </a:solidFill>
-                <a:latin typeface="Karla"/>
+                <a:latin typeface="Calibri"/>
               </a:rPr>
               <a:t>6 / 15</a:t>
             </a:r>
@@ -12253,97 +11637,9 @@
                 <a:solidFill>
                   <a:srgbClr val="256B4A"/>
                 </a:solidFill>
-                <a:latin typeface="Karla"/>
+                <a:latin typeface="Calibri"/>
               </a:rPr>
               <a:t>CARDS BACK TO THEIR OWNERS</a:t>
-            </a:r>
-          </a:p>
-        </p:txBody>
-      </p:sp>
-      <p:sp>
-        <p:nvSpPr>
-          <p:cNvPr id="4" name="Rounded Rectangle 3"/>
-          <p:cNvSpPr/>
-          <p:nvPr/>
-        </p:nvSpPr>
-        <p:spPr>
-          <a:xfrm>
-            <a:off x="7086600" y="530352"/>
-            <a:ext cx="1371600" cy="347472"/>
-          </a:xfrm>
-          <a:prstGeom prst="roundRect">
-            <a:avLst>
-              <a:gd name="adj" fmla="val 50000"/>
-            </a:avLst>
-          </a:prstGeom>
-          <a:solidFill>
-            <a:srgbClr val="EEF3F1"/>
-          </a:solidFill>
-          <a:ln>
-            <a:noFill/>
-          </a:ln>
-          <a:effectLst/>
-        </p:spPr>
-        <p:style>
-          <a:lnRef idx="1">
-            <a:schemeClr val="accent1"/>
-          </a:lnRef>
-          <a:fillRef idx="3">
-            <a:schemeClr val="accent1"/>
-          </a:fillRef>
-          <a:effectRef idx="2">
-            <a:schemeClr val="accent1"/>
-          </a:effectRef>
-          <a:fontRef idx="minor">
-            <a:schemeClr val="lt1"/>
-          </a:fontRef>
-        </p:style>
-        <p:txBody>
-          <a:bodyPr rtlCol="0" anchor="ctr"/>
-          <a:lstStyle/>
-          <a:p>
-            <a:pPr algn="ctr"/>
-          </a:p>
-        </p:txBody>
-      </p:sp>
-      <p:sp>
-        <p:nvSpPr>
-          <p:cNvPr id="5" name="TextBox 4"/>
-          <p:cNvSpPr txBox="1"/>
-          <p:nvPr/>
-        </p:nvSpPr>
-        <p:spPr>
-          <a:xfrm>
-            <a:off x="7086600" y="589788"/>
-            <a:ext cx="1371600" cy="237744"/>
-          </a:xfrm>
-          <a:prstGeom prst="rect">
-            <a:avLst/>
-          </a:prstGeom>
-          <a:noFill/>
-        </p:spPr>
-        <p:txBody>
-          <a:bodyPr wrap="square" lIns="0" rIns="0" tIns="0" bIns="0" anchor="t">
-            <a:spAutoFit/>
-          </a:bodyPr>
-          <a:lstStyle/>
-          <a:p>
-            <a:pPr algn="ctr">
-              <a:lnSpc>
-                <a:spcPct val="125000"/>
-              </a:lnSpc>
-              <a:spcAft>
-                <a:spcPts val="0"/>
-              </a:spcAft>
-            </a:pPr>
-            <a:r>
-              <a:rPr sz="1000" b="1" i="0" spc="100">
-                <a:solidFill>
-                  <a:srgbClr val="256B4A"/>
-                </a:solidFill>
-                <a:latin typeface="Karla"/>
-              </a:rPr>
-              <a:t>READ IT</a:t>
             </a:r>
           </a:p>
         </p:txBody>
@@ -12379,11 +11675,11 @@
               </a:spcAft>
             </a:pPr>
             <a:r>
-              <a:rPr sz="3200" b="1" i="0">
+              <a:rPr sz="3200" b="0" i="0">
                 <a:solidFill>
                   <a:srgbClr val="2C3A33"/>
                 </a:solidFill>
-                <a:latin typeface="Libre Caslon Display"/>
+                <a:latin typeface="Georgia"/>
               </a:rPr>
               <a:t>What did they spot?</a:t>
             </a:r>
@@ -12513,11 +11809,11 @@
               </a:spcAft>
             </a:pPr>
             <a:r>
-              <a:rPr sz="1200" b="1" i="0">
+              <a:rPr sz="1200" b="0" i="0">
                 <a:solidFill>
                   <a:srgbClr val="FFFDF7"/>
                 </a:solidFill>
-                <a:latin typeface="Libre Caslon Display"/>
+                <a:latin typeface="Georgia"/>
               </a:rPr>
               <a:t>1</a:t>
             </a:r>
@@ -12559,7 +11855,7 @@
                 <a:solidFill>
                   <a:srgbClr val="2C3A33"/>
                 </a:solidFill>
-                <a:latin typeface="Karla"/>
+                <a:latin typeface="Calibri"/>
               </a:rPr>
               <a:t>Which criterion did most people miss? There is usually one.</a:t>
             </a:r>
@@ -12689,11 +11985,11 @@
               </a:spcAft>
             </a:pPr>
             <a:r>
-              <a:rPr sz="1200" b="1" i="0">
+              <a:rPr sz="1200" b="0" i="0">
                 <a:solidFill>
                   <a:srgbClr val="FFFDF7"/>
                 </a:solidFill>
-                <a:latin typeface="Libre Caslon Display"/>
+                <a:latin typeface="Georgia"/>
               </a:rPr>
               <a:t>2</a:t>
             </a:r>
@@ -12735,7 +12031,7 @@
                 <a:solidFill>
                   <a:srgbClr val="2C3A33"/>
                 </a:solidFill>
-                <a:latin typeface="Karla"/>
+                <a:latin typeface="Calibri"/>
               </a:rPr>
               <a:t>Did anybody get all four without trying? What was in it?</a:t>
             </a:r>
@@ -12865,11 +12161,11 @@
               </a:spcAft>
             </a:pPr>
             <a:r>
-              <a:rPr sz="1200" b="1" i="0">
+              <a:rPr sz="1200" b="0" i="0">
                 <a:solidFill>
                   <a:srgbClr val="FFFDF7"/>
                 </a:solidFill>
-                <a:latin typeface="Libre Caslon Display"/>
+                <a:latin typeface="Georgia"/>
               </a:rPr>
               <a:t>3</a:t>
             </a:r>
@@ -12911,7 +12207,7 @@
                 <a:solidFill>
                   <a:srgbClr val="2C3A33"/>
                 </a:solidFill>
-                <a:latin typeface="Karla"/>
+                <a:latin typeface="Calibri"/>
               </a:rPr>
               <a:t>Whose feedback are you actually going to take?</a:t>
             </a:r>
@@ -12953,7 +12249,7 @@
                 <a:solidFill>
                   <a:srgbClr val="256B4A"/>
                 </a:solidFill>
-                <a:latin typeface="Karla"/>
+                <a:latin typeface="Calibri"/>
               </a:rPr>
               <a:t>Fibre is the one that goes missing, and a spoonful of seeds or some fruit fixes it.</a:t>
             </a:r>
@@ -13019,7 +12315,7 @@
                 <a:solidFill>
                   <a:srgbClr val="98A29B"/>
                 </a:solidFill>
-                <a:latin typeface="Karla"/>
+                <a:latin typeface="Calibri"/>
               </a:rPr>
               <a:t>The Pastoral Guide</a:t>
             </a:r>
@@ -13061,7 +12357,7 @@
                 <a:solidFill>
                   <a:srgbClr val="98A29B"/>
                 </a:solidFill>
-                <a:latin typeface="Karla"/>
+                <a:latin typeface="Calibri"/>
               </a:rPr>
               <a:t>7 / 15</a:t>
             </a:r>
@@ -13165,97 +12461,9 @@
                 <a:solidFill>
                   <a:srgbClr val="256B4A"/>
                 </a:solidFill>
-                <a:latin typeface="Karla"/>
+                <a:latin typeface="Calibri"/>
               </a:rPr>
               <a:t>THE BIT THAT LEAVES THIS ROOM</a:t>
-            </a:r>
-          </a:p>
-        </p:txBody>
-      </p:sp>
-      <p:sp>
-        <p:nvSpPr>
-          <p:cNvPr id="4" name="Rounded Rectangle 3"/>
-          <p:cNvSpPr/>
-          <p:nvPr/>
-        </p:nvSpPr>
-        <p:spPr>
-          <a:xfrm>
-            <a:off x="7086600" y="530352"/>
-            <a:ext cx="1371600" cy="347472"/>
-          </a:xfrm>
-          <a:prstGeom prst="roundRect">
-            <a:avLst>
-              <a:gd name="adj" fmla="val 50000"/>
-            </a:avLst>
-          </a:prstGeom>
-          <a:solidFill>
-            <a:srgbClr val="EEF3F1"/>
-          </a:solidFill>
-          <a:ln>
-            <a:noFill/>
-          </a:ln>
-          <a:effectLst/>
-        </p:spPr>
-        <p:style>
-          <a:lnRef idx="1">
-            <a:schemeClr val="accent1"/>
-          </a:lnRef>
-          <a:fillRef idx="3">
-            <a:schemeClr val="accent1"/>
-          </a:fillRef>
-          <a:effectRef idx="2">
-            <a:schemeClr val="accent1"/>
-          </a:effectRef>
-          <a:fontRef idx="minor">
-            <a:schemeClr val="lt1"/>
-          </a:fontRef>
-        </p:style>
-        <p:txBody>
-          <a:bodyPr rtlCol="0" anchor="ctr"/>
-          <a:lstStyle/>
-          <a:p>
-            <a:pPr algn="ctr"/>
-          </a:p>
-        </p:txBody>
-      </p:sp>
-      <p:sp>
-        <p:nvSpPr>
-          <p:cNvPr id="5" name="TextBox 4"/>
-          <p:cNvSpPr txBox="1"/>
-          <p:nvPr/>
-        </p:nvSpPr>
-        <p:spPr>
-          <a:xfrm>
-            <a:off x="7086600" y="589788"/>
-            <a:ext cx="1371600" cy="237744"/>
-          </a:xfrm>
-          <a:prstGeom prst="rect">
-            <a:avLst/>
-          </a:prstGeom>
-          <a:noFill/>
-        </p:spPr>
-        <p:txBody>
-          <a:bodyPr wrap="square" lIns="0" rIns="0" tIns="0" bIns="0" anchor="t">
-            <a:spAutoFit/>
-          </a:bodyPr>
-          <a:lstStyle/>
-          <a:p>
-            <a:pPr algn="ctr">
-              <a:lnSpc>
-                <a:spcPct val="125000"/>
-              </a:lnSpc>
-              <a:spcAft>
-                <a:spcPts val="0"/>
-              </a:spcAft>
-            </a:pPr>
-            <a:r>
-              <a:rPr sz="1000" b="1" i="0" spc="100">
-                <a:solidFill>
-                  <a:srgbClr val="256B4A"/>
-                </a:solidFill>
-                <a:latin typeface="Karla"/>
-              </a:rPr>
-              <a:t>CHOOSE</a:t>
             </a:r>
           </a:p>
         </p:txBody>
@@ -13291,11 +12499,11 @@
               </a:spcAft>
             </a:pPr>
             <a:r>
-              <a:rPr sz="3200" b="1" i="0">
+              <a:rPr sz="3200" b="0" i="0">
                 <a:solidFill>
                   <a:srgbClr val="2C3A33"/>
                 </a:solidFill>
-                <a:latin typeface="Libre Caslon Display"/>
+                <a:latin typeface="Georgia"/>
               </a:rPr>
               <a:t>The class collection</a:t>
             </a:r>
@@ -13337,7 +12545,7 @@
                 <a:solidFill>
                   <a:srgbClr val="5F6B64"/>
                 </a:solidFill>
-                <a:latin typeface="Karla"/>
+                <a:latin typeface="Calibri"/>
               </a:rPr>
               <a:t>Every recipe that hits all four goes in. You each get a copy to take home.</a:t>
             </a:r>
@@ -13423,11 +12631,11 @@
               </a:spcAft>
             </a:pPr>
             <a:r>
-              <a:rPr sz="1350" b="1" i="0">
+              <a:rPr sz="1350" b="0" i="0">
                 <a:solidFill>
                   <a:srgbClr val="256B4A"/>
                 </a:solidFill>
-                <a:latin typeface="Libre Caslon Display"/>
+                <a:latin typeface="Georgia"/>
               </a:rPr>
               <a:t>Cheapest</a:t>
             </a:r>
@@ -13469,7 +12677,7 @@
                 <a:solidFill>
                   <a:srgbClr val="5F6B64"/>
                 </a:solidFill>
-                <a:latin typeface="Karla"/>
+                <a:latin typeface="Calibri"/>
               </a:rPr>
               <a:t>The one that costs least to make.</a:t>
             </a:r>
@@ -13555,11 +12763,11 @@
               </a:spcAft>
             </a:pPr>
             <a:r>
-              <a:rPr sz="1350" b="1" i="0">
+              <a:rPr sz="1350" b="0" i="0">
                 <a:solidFill>
                   <a:srgbClr val="256B4A"/>
                 </a:solidFill>
-                <a:latin typeface="Libre Caslon Display"/>
+                <a:latin typeface="Georgia"/>
               </a:rPr>
               <a:t>Fastest</a:t>
             </a:r>
@@ -13601,7 +12809,7 @@
                 <a:solidFill>
                   <a:srgbClr val="5F6B64"/>
                 </a:solidFill>
-                <a:latin typeface="Karla"/>
+                <a:latin typeface="Calibri"/>
               </a:rPr>
               <a:t>Under five minutes, start to finish.</a:t>
             </a:r>
@@ -13687,11 +12895,11 @@
               </a:spcAft>
             </a:pPr>
             <a:r>
-              <a:rPr sz="1350" b="1" i="0">
+              <a:rPr sz="1350" b="0" i="0">
                 <a:solidFill>
                   <a:srgbClr val="256B4A"/>
                 </a:solidFill>
-                <a:latin typeface="Libre Caslon Display"/>
+                <a:latin typeface="Georgia"/>
               </a:rPr>
               <a:t>The one you would actually choose</a:t>
             </a:r>
@@ -13733,7 +12941,7 @@
                 <a:solidFill>
                   <a:srgbClr val="5F6B64"/>
                 </a:solidFill>
-                <a:latin typeface="Karla"/>
+                <a:latin typeface="Calibri"/>
               </a:rPr>
               <a:t>Not the healthiest. The one you would pick.</a:t>
             </a:r>
@@ -13775,7 +12983,7 @@
                 <a:solidFill>
                   <a:srgbClr val="256B4A"/>
                 </a:solidFill>
-                <a:latin typeface="Karla"/>
+                <a:latin typeface="Calibri"/>
               </a:rPr>
               <a:t>Vote on the last one. It is the best guide to who will keep doing this.</a:t>
             </a:r>
@@ -13841,7 +13049,7 @@
                 <a:solidFill>
                   <a:srgbClr val="98A29B"/>
                 </a:solidFill>
-                <a:latin typeface="Karla"/>
+                <a:latin typeface="Calibri"/>
               </a:rPr>
               <a:t>The Pastoral Guide</a:t>
             </a:r>
@@ -13883,7 +13091,7 @@
                 <a:solidFill>
                   <a:srgbClr val="98A29B"/>
                 </a:solidFill>
-                <a:latin typeface="Karla"/>
+                <a:latin typeface="Calibri"/>
               </a:rPr>
               <a:t>8 / 15</a:t>
             </a:r>
@@ -14033,7 +13241,7 @@
                 <a:solidFill>
                   <a:srgbClr val="256B4A"/>
                 </a:solidFill>
-                <a:latin typeface="Karla"/>
+                <a:latin typeface="Calibri"/>
               </a:rPr>
               <a:t>OPTION A</a:t>
             </a:r>
@@ -14075,7 +13283,7 @@
                 <a:solidFill>
                   <a:srgbClr val="256B4A"/>
                 </a:solidFill>
-                <a:latin typeface="Karla"/>
+                <a:latin typeface="Calibri"/>
               </a:rPr>
               <a:t>ONLY IF YOUR SCHOOL ALLOWS IT</a:t>
             </a:r>
@@ -14113,11 +13321,11 @@
               </a:spcAft>
             </a:pPr>
             <a:r>
-              <a:rPr sz="3200" b="1" i="0">
+              <a:rPr sz="3200" b="0" i="0">
                 <a:solidFill>
                   <a:srgbClr val="2C3A33"/>
                 </a:solidFill>
-                <a:latin typeface="Libre Caslon Display"/>
+                <a:latin typeface="Georgia"/>
               </a:rPr>
               <a:t>Taste it</a:t>
             </a:r>
@@ -14207,7 +13415,7 @@
                 <a:solidFill>
                   <a:srgbClr val="2C3A33"/>
                 </a:solidFill>
-                <a:latin typeface="Karla"/>
+                <a:latin typeface="Calibri"/>
               </a:rPr>
               <a:t>Only food made at home by somebody who has listed every ingredient on the card.</a:t>
             </a:r>
@@ -14297,7 +13505,7 @@
                 <a:solidFill>
                   <a:srgbClr val="2C3A33"/>
                 </a:solidFill>
-                <a:latin typeface="Karla"/>
+                <a:latin typeface="Calibri"/>
               </a:rPr>
               <a:t>No list, no tasting. There are no exceptions to that today.</a:t>
             </a:r>
@@ -14387,7 +13595,7 @@
                 <a:solidFill>
                   <a:srgbClr val="2C3A33"/>
                 </a:solidFill>
-                <a:latin typeface="Karla"/>
+                <a:latin typeface="Calibri"/>
               </a:rPr>
               <a:t>If you have an allergy you do not taste. There is no safe way round it.</a:t>
             </a:r>
@@ -14477,7 +13685,7 @@
                 <a:solidFill>
                   <a:srgbClr val="2C3A33"/>
                 </a:solidFill>
-                <a:latin typeface="Karla"/>
+                <a:latin typeface="Calibri"/>
               </a:rPr>
               <a:t>You may say no to anything, and nobody gets to ask why.</a:t>
             </a:r>
@@ -14519,7 +13727,7 @@
                 <a:solidFill>
                   <a:srgbClr val="256B4A"/>
                 </a:solidFill>
-                <a:latin typeface="Karla"/>
+                <a:latin typeface="Calibri"/>
               </a:rPr>
               <a:t>Small amounts, one at a time. Say what you notice, not whether you liked it.</a:t>
             </a:r>
@@ -14585,7 +13793,7 @@
                 <a:solidFill>
                   <a:srgbClr val="98A29B"/>
                 </a:solidFill>
-                <a:latin typeface="Karla"/>
+                <a:latin typeface="Calibri"/>
               </a:rPr>
               <a:t>The Pastoral Guide</a:t>
             </a:r>
@@ -14627,7 +13835,7 @@
                 <a:solidFill>
                   <a:srgbClr val="98A29B"/>
                 </a:solidFill>
-                <a:latin typeface="Karla"/>
+                <a:latin typeface="Calibri"/>
               </a:rPr>
               <a:t>9 / 15</a:t>
             </a:r>

--- a/tutor-time/fuel-and-focus/downloads/Fuel_and_Focus_Lesson_3.pptx
+++ b/tutor-time/fuel-and-focus/downloads/Fuel_and_Focus_Lesson_3.pptx
@@ -3335,17 +3335,7 @@
                 </a:solidFill>
                 <a:latin typeface="Calibri"/>
               </a:rPr>
-              <a:t>Anyone can design a snack that is good for them.</a:t>
-            </a:r>
-            <a:br/>
-            <a:r>
-              <a:rPr sz="1500" b="0" i="0">
-                <a:solidFill>
-                  <a:srgbClr val="5F6B64"/>
-                </a:solidFill>
-                <a:latin typeface="Calibri"/>
-              </a:rPr>
-              <a:t>The hard part is designing one you will still want in three weeks.</a:t>
+              <a:t>Design a snack that is good for you, and that you will still want in three weeks.</a:t>
             </a:r>
           </a:p>
         </p:txBody>
@@ -5377,7 +5367,7 @@
                 </a:solidFill>
                 <a:latin typeface="Calibri"/>
               </a:rPr>
-              <a:t>THE BIT THAT ACTUALLY MATTERS</a:t>
+              <a:t>YOUR ONE CHANGE</a:t>
             </a:r>
           </a:p>
         </p:txBody>
